--- a/crates/lampstand-slides/tests/decks/04-preset-shapes.pptx
+++ b/crates/lampstand-slides/tests/decks/04-preset-shapes.pptx
@@ -7,6 +7,7 @@
   <p:sldIdLst>
     <p:sldId id="256" r:id="rId7"/>
     <p:sldId id="257" r:id="rId8"/>
+    <p:sldId id="258" r:id="rId9"/>
   </p:sldIdLst>
   <p:sldSz cx="12191695" cy="6858000" type="screen4x3"/>
   <p:notesSz cx="6858000" cy="9144000"/>
@@ -4881,6 +4882,225 @@
           </a:prstGeom>
           <a:solidFill>
             <a:srgbClr val="B0413E"/>
+          </a:solidFill>
+          <a:ln w="19050">
+            <a:solidFill>
+              <a:srgbClr val="222222"/>
+            </a:solidFill>
+          </a:ln>
+        </p:spPr>
+        <p:style>
+          <a:lnRef idx="1">
+            <a:schemeClr val="accent1"/>
+          </a:lnRef>
+          <a:fillRef idx="3">
+            <a:schemeClr val="accent1"/>
+          </a:fillRef>
+          <a:effectRef idx="2">
+            <a:schemeClr val="accent1"/>
+          </a:effectRef>
+          <a:fontRef idx="minor">
+            <a:schemeClr val="lt1"/>
+          </a:fontRef>
+        </p:style>
+        <p:txBody>
+          <a:bodyPr rtlCol="0" anchor="ctr"/>
+          <a:lstStyle/>
+          <a:p>
+            <a:pPr algn="ctr"/>
+          </a:p>
+        </p:txBody>
+      </p:sp>
+    </p:spTree>
+  </p:cSld>
+  <p:clrMapOvr>
+    <a:masterClrMapping/>
+  </p:clrMapOvr>
+</p:sld>
+</file>
+
+<file path=ppt/slides/slide3.xml><?xml version="1.0" encoding="utf-8"?>
+<p:sld xmlns:a="http://schemas.openxmlformats.org/drawingml/2006/main" xmlns:p="http://schemas.openxmlformats.org/presentationml/2006/main" xmlns:r="http://schemas.openxmlformats.org/officeDocument/2006/relationships">
+  <p:cSld>
+    <p:spTree>
+      <p:nvGrpSpPr>
+        <p:cNvPr id="1" name=""/>
+        <p:cNvGrpSpPr/>
+        <p:nvPr/>
+      </p:nvGrpSpPr>
+      <p:grpSpPr/>
+      <p:sp>
+        <p:nvSpPr>
+          <p:cNvPr id="2" name="Title 1"/>
+          <p:cNvSpPr>
+            <a:spLocks noGrp="1"/>
+          </p:cNvSpPr>
+          <p:nvPr>
+            <p:ph type="title"/>
+          </p:nvPr>
+        </p:nvSpPr>
+        <p:spPr/>
+        <p:txBody>
+          <a:bodyPr/>
+          <a:lstStyle/>
+          <a:p>
+            <a:r>
+              <a:t>Shapes with holes</a:t>
+            </a:r>
+          </a:p>
+        </p:txBody>
+      </p:sp>
+      <p:sp>
+        <p:nvSpPr>
+          <p:cNvPr id="3" name="Donut 2"/>
+          <p:cNvSpPr/>
+          <p:nvPr/>
+        </p:nvSpPr>
+        <p:spPr>
+          <a:xfrm>
+            <a:off x="640080" y="2011680"/>
+            <a:ext cx="2377440" cy="2377440"/>
+          </a:xfrm>
+          <a:prstGeom prst="donut">
+            <a:avLst/>
+          </a:prstGeom>
+          <a:solidFill>
+            <a:srgbClr val="2E6F9E"/>
+          </a:solidFill>
+          <a:ln w="19050">
+            <a:solidFill>
+              <a:srgbClr val="222222"/>
+            </a:solidFill>
+          </a:ln>
+        </p:spPr>
+        <p:style>
+          <a:lnRef idx="1">
+            <a:schemeClr val="accent1"/>
+          </a:lnRef>
+          <a:fillRef idx="3">
+            <a:schemeClr val="accent1"/>
+          </a:fillRef>
+          <a:effectRef idx="2">
+            <a:schemeClr val="accent1"/>
+          </a:effectRef>
+          <a:fontRef idx="minor">
+            <a:schemeClr val="lt1"/>
+          </a:fontRef>
+        </p:style>
+        <p:txBody>
+          <a:bodyPr rtlCol="0" anchor="ctr"/>
+          <a:lstStyle/>
+          <a:p>
+            <a:pPr algn="ctr"/>
+          </a:p>
+        </p:txBody>
+      </p:sp>
+      <p:sp>
+        <p:nvSpPr>
+          <p:cNvPr id="4" name="Frame 3"/>
+          <p:cNvSpPr/>
+          <p:nvPr/>
+        </p:nvSpPr>
+        <p:spPr>
+          <a:xfrm>
+            <a:off x="3474720" y="2011680"/>
+            <a:ext cx="2377440" cy="2377440"/>
+          </a:xfrm>
+          <a:prstGeom prst="frame">
+            <a:avLst/>
+          </a:prstGeom>
+          <a:solidFill>
+            <a:srgbClr val="C8553D"/>
+          </a:solidFill>
+          <a:ln w="19050">
+            <a:solidFill>
+              <a:srgbClr val="222222"/>
+            </a:solidFill>
+          </a:ln>
+        </p:spPr>
+        <p:style>
+          <a:lnRef idx="1">
+            <a:schemeClr val="accent1"/>
+          </a:lnRef>
+          <a:fillRef idx="3">
+            <a:schemeClr val="accent1"/>
+          </a:fillRef>
+          <a:effectRef idx="2">
+            <a:schemeClr val="accent1"/>
+          </a:effectRef>
+          <a:fontRef idx="minor">
+            <a:schemeClr val="lt1"/>
+          </a:fontRef>
+        </p:style>
+        <p:txBody>
+          <a:bodyPr rtlCol="0" anchor="ctr"/>
+          <a:lstStyle/>
+          <a:p>
+            <a:pPr algn="ctr"/>
+          </a:p>
+        </p:txBody>
+      </p:sp>
+      <p:sp>
+        <p:nvSpPr>
+          <p:cNvPr id="5" name="&quot;No&quot; Symbol 4"/>
+          <p:cNvSpPr/>
+          <p:nvPr/>
+        </p:nvSpPr>
+        <p:spPr>
+          <a:xfrm>
+            <a:off x="6309360" y="2011680"/>
+            <a:ext cx="2377440" cy="2377440"/>
+          </a:xfrm>
+          <a:prstGeom prst="noSmoking">
+            <a:avLst/>
+          </a:prstGeom>
+          <a:solidFill>
+            <a:srgbClr val="F2A541"/>
+          </a:solidFill>
+          <a:ln w="19050">
+            <a:solidFill>
+              <a:srgbClr val="222222"/>
+            </a:solidFill>
+          </a:ln>
+        </p:spPr>
+        <p:style>
+          <a:lnRef idx="1">
+            <a:schemeClr val="accent1"/>
+          </a:lnRef>
+          <a:fillRef idx="3">
+            <a:schemeClr val="accent1"/>
+          </a:fillRef>
+          <a:effectRef idx="2">
+            <a:schemeClr val="accent1"/>
+          </a:effectRef>
+          <a:fontRef idx="minor">
+            <a:schemeClr val="lt1"/>
+          </a:fontRef>
+        </p:style>
+        <p:txBody>
+          <a:bodyPr rtlCol="0" anchor="ctr"/>
+          <a:lstStyle/>
+          <a:p>
+            <a:pPr algn="ctr"/>
+          </a:p>
+        </p:txBody>
+      </p:sp>
+      <p:sp>
+        <p:nvSpPr>
+          <p:cNvPr id="6" name="Funnel 5"/>
+          <p:cNvSpPr/>
+          <p:nvPr/>
+        </p:nvSpPr>
+        <p:spPr>
+          <a:xfrm>
+            <a:off x="9144000" y="2011680"/>
+            <a:ext cx="2377440" cy="2377440"/>
+          </a:xfrm>
+          <a:prstGeom prst="funnel">
+            <a:avLst/>
+          </a:prstGeom>
+          <a:solidFill>
+            <a:srgbClr val="588B5B"/>
           </a:solidFill>
           <a:ln w="19050">
             <a:solidFill>
